--- a/curso/pptx/S55.pptx
+++ b/curso/pptx/S55.pptx
@@ -5190,7 +5190,7 @@
                 </a:solidFill>
                 <a:latin typeface="Nunito Sans"/>
               </a:rPr>
-              <a:t>La publicidad y sus técnicas</a:t>
+              <a:t>广告和它的技巧</a:t>
             </a:r>
           </a:p>
           <a:p>
@@ -5215,7 +5215,7 @@
                 </a:solidFill>
                 <a:latin typeface="Nunito Sans"/>
               </a:rPr>
-              <a:t>Los influencers</a:t>
+              <a:t>网红</a:t>
             </a:r>
           </a:p>
           <a:p>
@@ -5240,7 +5240,7 @@
                 </a:solidFill>
                 <a:latin typeface="Nunito Sans"/>
               </a:rPr>
-              <a:t>Las apps que enganchan y los algoritmos</a:t>
+              <a:t>让人上瘾的应用和算法</a:t>
             </a:r>
           </a:p>
           <a:p>
@@ -5265,7 +5265,7 @@
                 </a:solidFill>
                 <a:latin typeface="Nunito Sans"/>
               </a:rPr>
-              <a:t>El grupo: «todo el mundo lo hace»</a:t>
+              <a:t>群体：“所有人都这么做”</a:t>
             </a:r>
           </a:p>
         </p:txBody>
@@ -7059,7 +7059,7 @@
                 </a:solidFill>
                 <a:latin typeface="Nunito Sans"/>
               </a:rPr>
-              <a:t>Del griego </a:t>
+              <a:t>来自希腊语 </a:t>
             </a:r>
             <a:r>
               <a:rPr sz="2800" b="1">
@@ -7077,7 +7077,7 @@
                 </a:solidFill>
                 <a:latin typeface="Nunito Sans"/>
               </a:rPr>
-              <a:t> (uno mismo) y </a:t>
+              <a:t>（自己）和 </a:t>
             </a:r>
             <a:r>
               <a:rPr sz="2800" b="1">
@@ -7095,7 +7095,7 @@
                 </a:solidFill>
                 <a:latin typeface="Nunito Sans"/>
               </a:rPr>
-              <a:t> (ley, norma)</a:t>
+              <a:t>（法律、规范）</a:t>
             </a:r>
           </a:p>
           <a:p>
@@ -7120,7 +7120,7 @@
                 </a:solidFill>
                 <a:latin typeface="Nunito Sans"/>
               </a:rPr>
-              <a:t>Lo contrario: </a:t>
+              <a:t>反面：</a:t>
             </a:r>
             <a:r>
               <a:rPr sz="2800" b="1">
@@ -7129,7 +7129,7 @@
                 </a:solidFill>
                 <a:latin typeface="Nunito Sans"/>
               </a:rPr>
-              <a:t>heteronomía</a:t>
+              <a:t>他律</a:t>
             </a:r>
             <a:r>
               <a:rPr sz="2800" b="0">
@@ -7138,7 +7138,7 @@
                 </a:solidFill>
                 <a:latin typeface="Nunito Sans"/>
               </a:rPr>
-              <a:t>, que otros o tus impulsos decidan por ti</a:t>
+              <a:t>，即由别人或你的冲动替你做决定</a:t>
             </a:r>
           </a:p>
           <a:p>
@@ -7163,7 +7163,7 @@
                 </a:solidFill>
                 <a:latin typeface="Nunito Sans"/>
               </a:rPr>
-              <a:t>No es hacer lo que me da la gana</a:t>
+              <a:t>不是想干什么就干什么</a:t>
             </a:r>
           </a:p>
           <a:p>
@@ -7188,7 +7188,7 @@
                 </a:solidFill>
                 <a:latin typeface="Nunito Sans"/>
               </a:rPr>
-              <a:t>Se aprende poco a poco</a:t>
+              <a:t>是一点一点学会的</a:t>
             </a:r>
           </a:p>
         </p:txBody>
@@ -7422,7 +7422,7 @@
                 </a:solidFill>
                 <a:latin typeface="Nunito Sans"/>
               </a:rPr>
-              <a:t>Pensar solo, sin escuchar a nadie</a:t>
+              <a:t>一个人想，不听任何人的</a:t>
             </a:r>
           </a:p>
           <a:p>
@@ -7447,7 +7447,7 @@
                 </a:solidFill>
                 <a:latin typeface="Nunito Sans"/>
               </a:rPr>
-              <a:t>Llevar siempre la contraria</a:t>
+              <a:t>总是唱反调</a:t>
             </a:r>
           </a:p>
           <a:p>
@@ -7472,7 +7472,7 @@
                 </a:solidFill>
                 <a:latin typeface="Nunito Sans"/>
               </a:rPr>
-              <a:t>Inventarlo todo desde cero</a:t>
+              <a:t>一切都从零开始自己发明</a:t>
             </a:r>
           </a:p>
           <a:p>
@@ -7497,7 +7497,7 @@
                 </a:solidFill>
                 <a:latin typeface="Nunito Sans"/>
               </a:rPr>
-              <a:t>No hacer caso a los expertos</a:t>
+              <a:t>不理会专家</a:t>
             </a:r>
           </a:p>
         </p:txBody>
@@ -7627,7 +7627,7 @@
                 </a:solidFill>
                 <a:latin typeface="Nunito Sans"/>
               </a:rPr>
-              <a:t>Escuchar a otros y pedir razones</a:t>
+              <a:t>倾听别人，并要求对方给出理由</a:t>
             </a:r>
           </a:p>
           <a:p>
@@ -7652,7 +7652,7 @@
                 </a:solidFill>
                 <a:latin typeface="Nunito Sans"/>
               </a:rPr>
-              <a:t>Decidir yo con esas razones</a:t>
+              <a:t>由我根据这些理由来决定</a:t>
             </a:r>
           </a:p>
           <a:p>
@@ -7677,7 +7677,7 @@
                 </a:solidFill>
                 <a:latin typeface="Nunito Sans"/>
               </a:rPr>
-              <a:t>Poder explicar por qué creo algo</a:t>
+              <a:t>能够解释我为什么相信某件事</a:t>
             </a:r>
           </a:p>
           <a:p>
@@ -7702,7 +7702,7 @@
                 </a:solidFill>
                 <a:latin typeface="Nunito Sans"/>
               </a:rPr>
-              <a:t>Cambiar si hay razones mejores</a:t>
+              <a:t>有更好的理由时就改变</a:t>
             </a:r>
           </a:p>
         </p:txBody>

--- a/curso/pptx/S55.pptx
+++ b/curso/pptx/S55.pptx
@@ -4047,7 +4047,7 @@
                 </a:solidFill>
                 <a:latin typeface="Fredoka"/>
               </a:rPr>
-              <a:t>案例1 · 凯文和他喜欢的油管博主</a:t>
+              <a:t>案例1 · 一个男孩和他喜欢的油管博主</a:t>
             </a:r>
           </a:p>
         </p:txBody>
@@ -4129,7 +4129,7 @@
                 </a:solidFill>
                 <a:latin typeface="Nunito Sans"/>
               </a:rPr>
-              <a:t>凯文在所有事情上都和他最喜欢的油管博主想法一样：音乐、政治、电子游戏、食物。别人问他为什么，他说：“他说的。”</a:t>
+              <a:t>一个男孩在所有事情上都和他最喜欢的油管博主想法一样：音乐、政治、电子游戏、食物。别人问他为什么，他说：“他说的。”</a:t>
             </a:r>
           </a:p>
         </p:txBody>
@@ -4252,7 +4252,7 @@
                 </a:solidFill>
                 <a:latin typeface="Nunito Sans"/>
               </a:rPr>
-              <a:t>结论：在这些事上，凯文不是自己在思考。是别人替他做决定：他律。</a:t>
+              <a:t>结论：在这些事上，这个男孩不是自己在思考。是别人替他做决定：他律。</a:t>
             </a:r>
           </a:p>
         </p:txBody>
@@ -4356,7 +4356,7 @@
                 </a:solidFill>
                 <a:latin typeface="Fredoka"/>
               </a:rPr>
-              <a:t>案例2 · 迈亚伦（Maialen）和医生</a:t>
+              <a:t>案例2 · 一个女孩和医生</a:t>
             </a:r>
           </a:p>
         </p:txBody>
@@ -4438,7 +4438,7 @@
                 </a:solidFill>
                 <a:latin typeface="Nunito Sans"/>
               </a:rPr>
-              <a:t>迈亚伦咳嗽。医生给她开了一种糖浆，迈亚伦就吃了。她是不是不再自己思考了？</a:t>
+              <a:t>一个女孩咳嗽。医生给她开了一种糖浆，这个女孩就吃了。她是不是不再自己思考了？</a:t>
             </a:r>
           </a:p>
         </p:txBody>
@@ -4486,7 +4486,7 @@
                 </a:solidFill>
                 <a:latin typeface="Nunito Sans"/>
               </a:rPr>
-              <a:t>迈亚伦不懂医学；医生懂（第26课）。</a:t>
+              <a:t>这个女孩不懂医学；医生懂（第26课）。</a:t>
             </a:r>
           </a:p>
           <a:p>
@@ -4747,7 +4747,7 @@
                 </a:solidFill>
                 <a:latin typeface="Nunito Sans"/>
               </a:rPr>
-              <a:t>奥马尔关注一位科学油管博主。他会去找其他来源，比较理由……最后几乎总是和他想的一样。</a:t>
+              <a:t>一个男孩关注一位科学油管博主。他会去找其他来源，比较理由……最后几乎总是和他想的一样。</a:t>
             </a:r>
           </a:p>
         </p:txBody>
@@ -4795,7 +4795,7 @@
                 </a:solidFill>
                 <a:latin typeface="Nunito Sans"/>
               </a:rPr>
-              <a:t>他和他的油管博主想的一样，就像凯文一样。他也不是自主的吗？</a:t>
+              <a:t>他和他的油管博主想的一样，就像前面那个男孩一样。他也不是自主的吗？</a:t>
             </a:r>
           </a:p>
           <a:p>
@@ -4820,7 +4820,7 @@
                 </a:solidFill>
                 <a:latin typeface="Nunito Sans"/>
               </a:rPr>
-              <a:t>看起来和凯文一样：观点和他的油管博主一模一样。</a:t>
+              <a:t>看起来和前面那个男孩一样：观点和他的油管博主一模一样。</a:t>
             </a:r>
           </a:p>
           <a:p>
@@ -4845,7 +4845,7 @@
                 </a:solidFill>
                 <a:latin typeface="Nunito Sans"/>
               </a:rPr>
-              <a:t>但奥马尔会比较来源，也能解释自己的理由。如果理由不能说服他，他就会表示不同意。</a:t>
+              <a:t>但这个男孩会比较来源，也能解释自己的理由。如果理由不能说服他，他就会表示不同意。</a:t>
             </a:r>
           </a:p>
           <a:p>
@@ -6682,7 +6682,7 @@
                 </a:solidFill>
                 <a:latin typeface="Nunito Sans"/>
               </a:rPr>
-              <a:t>凯文剪了和他最喜欢的油管博主一样的发型，用他的口头禅，在所有事情上都和他想法一样。</a:t>
+              <a:t>一个男孩剪了和他最喜欢的油管博主一样的发型，用他的口头禅，在所有事情上都和他想法一样。</a:t>
             </a:r>
           </a:p>
         </p:txBody>
@@ -6721,7 +6721,7 @@
                 </a:solidFill>
                 <a:latin typeface="Nunito Sans"/>
               </a:rPr>
-              <a:t>凯文是自己在思考吗？你怎么判断？</a:t>
+              <a:t>这个男孩是自己在思考吗？你怎么判断？</a:t>
             </a:r>
           </a:p>
         </p:txBody>
